--- a/tests/benchmark/architectural_slides/case_017_spatial_strategy_lead/output.pptx
+++ b/tests/benchmark/architectural_slides/case_017_spatial_strategy_lead/output.pptx
@@ -910,7 +910,7 @@
         <p:spPr>
           <a:xfrm>
             <a:off x="640080" y="411480"/>
-            <a:ext cx="7863840" cy="457200"/>
+            <a:ext cx="7863840" cy="601218"/>
           </a:xfrm>
           <a:prstGeom prst="rect">
             <a:avLst/>
@@ -948,7 +948,7 @@
         </p:nvSpPr>
         <p:spPr>
           <a:xfrm>
-            <a:off x="640080" y="906780"/>
+            <a:off x="640080" y="1050798"/>
             <a:ext cx="7863840" cy="365760"/>
           </a:xfrm>
           <a:prstGeom prst="rect">
@@ -987,8 +987,8 @@
         </p:nvSpPr>
         <p:spPr>
           <a:xfrm>
-            <a:off x="640080" y="1348740"/>
-            <a:ext cx="2545080" cy="2987040"/>
+            <a:off x="640080" y="1492758"/>
+            <a:ext cx="2545080" cy="2843022"/>
           </a:xfrm>
           <a:prstGeom prst="rect">
             <a:avLst/>
@@ -1026,8 +1026,8 @@
         </p:nvSpPr>
         <p:spPr>
           <a:xfrm>
-            <a:off x="3299460" y="1348740"/>
-            <a:ext cx="2545080" cy="2987040"/>
+            <a:off x="3299460" y="1492758"/>
+            <a:ext cx="2545080" cy="2843022"/>
           </a:xfrm>
           <a:prstGeom prst="rect">
             <a:avLst/>
@@ -1065,8 +1065,8 @@
         </p:nvSpPr>
         <p:spPr>
           <a:xfrm>
-            <a:off x="5958840" y="1348740"/>
-            <a:ext cx="2545080" cy="2987040"/>
+            <a:off x="5958840" y="1492758"/>
+            <a:ext cx="2545080" cy="2843022"/>
           </a:xfrm>
           <a:prstGeom prst="rect">
             <a:avLst/>

--- a/tests/benchmark/architectural_slides/case_017_spatial_strategy_lead/output.pptx
+++ b/tests/benchmark/architectural_slides/case_017_spatial_strategy_lead/output.pptx
@@ -910,7 +910,7 @@
         <p:spPr>
           <a:xfrm>
             <a:off x="640080" y="411480"/>
-            <a:ext cx="7863840" cy="601218"/>
+            <a:ext cx="7863840" cy="621792"/>
           </a:xfrm>
           <a:prstGeom prst="rect">
             <a:avLst/>
@@ -948,7 +948,7 @@
         </p:nvSpPr>
         <p:spPr>
           <a:xfrm>
-            <a:off x="640080" y="1050798"/>
+            <a:off x="640080" y="1071372"/>
             <a:ext cx="7863840" cy="365760"/>
           </a:xfrm>
           <a:prstGeom prst="rect">
@@ -987,8 +987,8 @@
         </p:nvSpPr>
         <p:spPr>
           <a:xfrm>
-            <a:off x="640080" y="1492758"/>
-            <a:ext cx="2545080" cy="2843022"/>
+            <a:off x="640080" y="1551432"/>
+            <a:ext cx="2545080" cy="2510028"/>
           </a:xfrm>
           <a:prstGeom prst="rect">
             <a:avLst/>
@@ -1026,8 +1026,8 @@
         </p:nvSpPr>
         <p:spPr>
           <a:xfrm>
-            <a:off x="3299460" y="1492758"/>
-            <a:ext cx="2545080" cy="2843022"/>
+            <a:off x="3299460" y="1551432"/>
+            <a:ext cx="2545080" cy="2510028"/>
           </a:xfrm>
           <a:prstGeom prst="rect">
             <a:avLst/>
@@ -1065,8 +1065,8 @@
         </p:nvSpPr>
         <p:spPr>
           <a:xfrm>
-            <a:off x="5958840" y="1492758"/>
-            <a:ext cx="2545080" cy="2843022"/>
+            <a:off x="5958840" y="1551432"/>
+            <a:ext cx="2545080" cy="2510028"/>
           </a:xfrm>
           <a:prstGeom prst="rect">
             <a:avLst/>

--- a/tests/benchmark/architectural_slides/case_017_spatial_strategy_lead/output.pptx
+++ b/tests/benchmark/architectural_slides/case_017_spatial_strategy_lead/output.pptx
@@ -910,7 +910,7 @@
         <p:spPr>
           <a:xfrm>
             <a:off x="640080" y="411480"/>
-            <a:ext cx="7863840" cy="621792"/>
+            <a:ext cx="7863840" cy="601218"/>
           </a:xfrm>
           <a:prstGeom prst="rect">
             <a:avLst/>
@@ -948,7 +948,7 @@
         </p:nvSpPr>
         <p:spPr>
           <a:xfrm>
-            <a:off x="640080" y="1071372"/>
+            <a:off x="640080" y="1050798"/>
             <a:ext cx="7863840" cy="365760"/>
           </a:xfrm>
           <a:prstGeom prst="rect">
@@ -987,8 +987,8 @@
         </p:nvSpPr>
         <p:spPr>
           <a:xfrm>
-            <a:off x="640080" y="1551432"/>
-            <a:ext cx="2545080" cy="2510028"/>
+            <a:off x="640080" y="1530858"/>
+            <a:ext cx="2545080" cy="2530602"/>
           </a:xfrm>
           <a:prstGeom prst="rect">
             <a:avLst/>
@@ -1026,8 +1026,8 @@
         </p:nvSpPr>
         <p:spPr>
           <a:xfrm>
-            <a:off x="3299460" y="1551432"/>
-            <a:ext cx="2545080" cy="2510028"/>
+            <a:off x="3299460" y="1530858"/>
+            <a:ext cx="2545080" cy="2530602"/>
           </a:xfrm>
           <a:prstGeom prst="rect">
             <a:avLst/>
@@ -1065,8 +1065,8 @@
         </p:nvSpPr>
         <p:spPr>
           <a:xfrm>
-            <a:off x="5958840" y="1551432"/>
-            <a:ext cx="2545080" cy="2510028"/>
+            <a:off x="5958840" y="1530858"/>
+            <a:ext cx="2545080" cy="2530602"/>
           </a:xfrm>
           <a:prstGeom prst="rect">
             <a:avLst/>
